--- a/docs/Formato Poster TecBioTec.pptx
+++ b/docs/Formato Poster TecBioTec.pptx
@@ -243,7 +243,7 @@
           <a:p>
             <a:fld id="{1F9F3312-0C28-44DD-A1C6-F03FBCB8F7D7}" type="datetimeFigureOut">
               <a:rPr lang="LID4096" smtClean="0"/>
-              <a:t>03/20/2026</a:t>
+              <a:t>04/13/2026</a:t>
             </a:fld>
             <a:endParaRPr lang="LID4096"/>
           </a:p>
@@ -413,7 +413,7 @@
           <a:p>
             <a:fld id="{1F9F3312-0C28-44DD-A1C6-F03FBCB8F7D7}" type="datetimeFigureOut">
               <a:rPr lang="LID4096" smtClean="0"/>
-              <a:t>03/20/2026</a:t>
+              <a:t>04/13/2026</a:t>
             </a:fld>
             <a:endParaRPr lang="LID4096"/>
           </a:p>
@@ -593,7 +593,7 @@
           <a:p>
             <a:fld id="{1F9F3312-0C28-44DD-A1C6-F03FBCB8F7D7}" type="datetimeFigureOut">
               <a:rPr lang="LID4096" smtClean="0"/>
-              <a:t>03/20/2026</a:t>
+              <a:t>04/13/2026</a:t>
             </a:fld>
             <a:endParaRPr lang="LID4096"/>
           </a:p>
@@ -763,7 +763,7 @@
           <a:p>
             <a:fld id="{1F9F3312-0C28-44DD-A1C6-F03FBCB8F7D7}" type="datetimeFigureOut">
               <a:rPr lang="LID4096" smtClean="0"/>
-              <a:t>03/20/2026</a:t>
+              <a:t>04/13/2026</a:t>
             </a:fld>
             <a:endParaRPr lang="LID4096"/>
           </a:p>
@@ -1009,7 +1009,7 @@
           <a:p>
             <a:fld id="{1F9F3312-0C28-44DD-A1C6-F03FBCB8F7D7}" type="datetimeFigureOut">
               <a:rPr lang="LID4096" smtClean="0"/>
-              <a:t>03/20/2026</a:t>
+              <a:t>04/13/2026</a:t>
             </a:fld>
             <a:endParaRPr lang="LID4096"/>
           </a:p>
@@ -1241,7 +1241,7 @@
           <a:p>
             <a:fld id="{1F9F3312-0C28-44DD-A1C6-F03FBCB8F7D7}" type="datetimeFigureOut">
               <a:rPr lang="LID4096" smtClean="0"/>
-              <a:t>03/20/2026</a:t>
+              <a:t>04/13/2026</a:t>
             </a:fld>
             <a:endParaRPr lang="LID4096"/>
           </a:p>
@@ -1608,7 +1608,7 @@
           <a:p>
             <a:fld id="{1F9F3312-0C28-44DD-A1C6-F03FBCB8F7D7}" type="datetimeFigureOut">
               <a:rPr lang="LID4096" smtClean="0"/>
-              <a:t>03/20/2026</a:t>
+              <a:t>04/13/2026</a:t>
             </a:fld>
             <a:endParaRPr lang="LID4096"/>
           </a:p>
@@ -1726,7 +1726,7 @@
           <a:p>
             <a:fld id="{1F9F3312-0C28-44DD-A1C6-F03FBCB8F7D7}" type="datetimeFigureOut">
               <a:rPr lang="LID4096" smtClean="0"/>
-              <a:t>03/20/2026</a:t>
+              <a:t>04/13/2026</a:t>
             </a:fld>
             <a:endParaRPr lang="LID4096"/>
           </a:p>
@@ -1821,7 +1821,7 @@
           <a:p>
             <a:fld id="{1F9F3312-0C28-44DD-A1C6-F03FBCB8F7D7}" type="datetimeFigureOut">
               <a:rPr lang="LID4096" smtClean="0"/>
-              <a:t>03/20/2026</a:t>
+              <a:t>04/13/2026</a:t>
             </a:fld>
             <a:endParaRPr lang="LID4096"/>
           </a:p>
@@ -2098,7 +2098,7 @@
           <a:p>
             <a:fld id="{1F9F3312-0C28-44DD-A1C6-F03FBCB8F7D7}" type="datetimeFigureOut">
               <a:rPr lang="LID4096" smtClean="0"/>
-              <a:t>03/20/2026</a:t>
+              <a:t>04/13/2026</a:t>
             </a:fld>
             <a:endParaRPr lang="LID4096"/>
           </a:p>
@@ -2355,7 +2355,7 @@
           <a:p>
             <a:fld id="{1F9F3312-0C28-44DD-A1C6-F03FBCB8F7D7}" type="datetimeFigureOut">
               <a:rPr lang="LID4096" smtClean="0"/>
-              <a:t>03/20/2026</a:t>
+              <a:t>04/13/2026</a:t>
             </a:fld>
             <a:endParaRPr lang="LID4096"/>
           </a:p>
@@ -2568,7 +2568,7 @@
           <a:p>
             <a:fld id="{1F9F3312-0C28-44DD-A1C6-F03FBCB8F7D7}" type="datetimeFigureOut">
               <a:rPr lang="LID4096" smtClean="0"/>
-              <a:t>03/20/2026</a:t>
+              <a:t>04/13/2026</a:t>
             </a:fld>
             <a:endParaRPr lang="LID4096"/>
           </a:p>
@@ -2983,10 +2983,10 @@
       </p:grpSpPr>
       <p:pic>
         <p:nvPicPr>
-          <p:cNvPr id="6" name="Imagen 5">
+          <p:cNvPr id="10" name="Imagen 9">
             <a:extLst>
               <a:ext uri="{FF2B5EF4-FFF2-40B4-BE49-F238E27FC236}">
-                <a16:creationId xmlns:a16="http://schemas.microsoft.com/office/drawing/2014/main" id="{2B8EE134-23BB-071D-A001-54C92A620412}"/>
+                <a16:creationId xmlns:a16="http://schemas.microsoft.com/office/drawing/2014/main" id="{8F9639AD-A4E1-DD7F-BC90-29D88D0C084A}"/>
               </a:ext>
             </a:extLst>
           </p:cNvPr>
@@ -4867,6 +4867,90 @@
               </a:rPr>
               <a:t>(Si aplica)</a:t>
             </a:r>
+          </a:p>
+        </p:txBody>
+      </p:sp>
+      <p:sp>
+        <p:nvSpPr>
+          <p:cNvPr id="11" name="CuadroTexto 10">
+            <a:extLst>
+              <a:ext uri="{FF2B5EF4-FFF2-40B4-BE49-F238E27FC236}">
+                <a16:creationId xmlns:a16="http://schemas.microsoft.com/office/drawing/2014/main" id="{B2FA33E5-0E14-563A-5963-67A8D8512105}"/>
+              </a:ext>
+            </a:extLst>
+          </p:cNvPr>
+          <p:cNvSpPr txBox="1"/>
+          <p:nvPr/>
+        </p:nvSpPr>
+        <p:spPr>
+          <a:xfrm>
+            <a:off x="9347200" y="2571243"/>
+            <a:ext cx="22682201" cy="1938992"/>
+          </a:xfrm>
+          <a:prstGeom prst="rect">
+            <a:avLst/>
+          </a:prstGeom>
+          <a:noFill/>
+        </p:spPr>
+        <p:txBody>
+          <a:bodyPr wrap="square">
+            <a:spAutoFit/>
+          </a:bodyPr>
+          <a:lstStyle/>
+          <a:p>
+            <a:pPr algn="r"/>
+            <a:r>
+              <a:rPr lang="es-MX" sz="4000" b="1" i="0" dirty="0">
+                <a:solidFill>
+                  <a:srgbClr val="C00000"/>
+                </a:solidFill>
+                <a:effectLst/>
+                <a:latin typeface="UTECtxt Black"/>
+              </a:rPr>
+              <a:t>Apreciado autor: </a:t>
+            </a:r>
+          </a:p>
+          <a:p>
+            <a:pPr algn="r"/>
+            <a:r>
+              <a:rPr lang="es-MX" sz="4000" dirty="0">
+                <a:solidFill>
+                  <a:srgbClr val="C00000"/>
+                </a:solidFill>
+                <a:latin typeface="UTECtxt Black"/>
+              </a:rPr>
+              <a:t>U</a:t>
+            </a:r>
+            <a:r>
+              <a:rPr lang="es-MX" sz="4000" i="0" dirty="0">
+                <a:solidFill>
+                  <a:srgbClr val="C00000"/>
+                </a:solidFill>
+                <a:effectLst/>
+                <a:latin typeface="UTECtxt Black"/>
+              </a:rPr>
+              <a:t>sted es libre de editar este contenido, manteniendo el formato de fondo y los estilos de color de la fuente.</a:t>
+            </a:r>
+          </a:p>
+          <a:p>
+            <a:pPr algn="r"/>
+            <a:r>
+              <a:rPr lang="es-MX" sz="4000" i="0" dirty="0">
+                <a:solidFill>
+                  <a:srgbClr val="C00000"/>
+                </a:solidFill>
+                <a:effectLst/>
+                <a:latin typeface="UTECtxt Black"/>
+              </a:rPr>
+              <a:t>(Este mensaje puede borrarse después de ser leído)</a:t>
+            </a:r>
+            <a:endParaRPr lang="es-419" sz="4000" i="0" dirty="0">
+              <a:solidFill>
+                <a:srgbClr val="C00000"/>
+              </a:solidFill>
+              <a:effectLst/>
+              <a:latin typeface="UTECtxt Black"/>
+            </a:endParaRPr>
           </a:p>
         </p:txBody>
       </p:sp>
@@ -5199,21 +5283,6 @@
 </file>
 
 <file path=customXml/item1.xml><?xml version="1.0" encoding="utf-8"?>
-<p:properties xmlns:p="http://schemas.microsoft.com/office/2006/metadata/properties" xmlns:xsi="http://www.w3.org/2001/XMLSchema-instance" xmlns:pc="http://schemas.microsoft.com/office/infopath/2007/PartnerControls">
-  <documentManagement/>
-</p:properties>
-</file>
-
-<file path=customXml/item2.xml><?xml version="1.0" encoding="utf-8"?>
-<?mso-contentType ?>
-<FormTemplates xmlns="http://schemas.microsoft.com/sharepoint/v3/contenttype/forms">
-  <Display>DocumentLibraryForm</Display>
-  <Edit>DocumentLibraryForm</Edit>
-  <New>DocumentLibraryForm</New>
-</FormTemplates>
-</file>
-
-<file path=customXml/item3.xml><?xml version="1.0" encoding="utf-8"?>
 <ct:contentTypeSchema xmlns:ct="http://schemas.microsoft.com/office/2006/metadata/contentType" xmlns:ma="http://schemas.microsoft.com/office/2006/metadata/properties/metaAttributes" ct:_="" ma:_="" ma:contentTypeName="Document" ma:contentTypeID="0x01010023F8B217EB3BBA47A565926AA8C7987D" ma:contentTypeVersion="4" ma:contentTypeDescription="Create a new document." ma:contentTypeScope="" ma:versionID="7ec4e4e9d386c585f62dfc6387f1e6fc">
   <xsd:schema xmlns:xsd="http://www.w3.org/2001/XMLSchema" xmlns:xs="http://www.w3.org/2001/XMLSchema" xmlns:p="http://schemas.microsoft.com/office/2006/metadata/properties" xmlns:ns3="cf7bb671-8198-4b47-b509-909fc9b35554" targetNamespace="http://schemas.microsoft.com/office/2006/metadata/properties" ma:root="true" ma:fieldsID="1dfda49997bf404ac9fff91666b685ec" ns3:_="">
     <xsd:import namespace="cf7bb671-8198-4b47-b509-909fc9b35554"/>
@@ -5357,31 +5426,22 @@
 </ct:contentTypeSchema>
 </file>
 
-<file path=customXml/itemProps1.xml><?xml version="1.0" encoding="utf-8"?>
-<ds:datastoreItem xmlns:ds="http://schemas.openxmlformats.org/officeDocument/2006/customXml" ds:itemID="{69BF16A5-2603-4EF6-830D-D5A6DFB47F9C}">
-  <ds:schemaRefs>
-    <ds:schemaRef ds:uri="http://schemas.microsoft.com/office/2006/documentManagement/types"/>
-    <ds:schemaRef ds:uri="http://purl.org/dc/dcmitype/"/>
-    <ds:schemaRef ds:uri="http://www.w3.org/XML/1998/namespace"/>
-    <ds:schemaRef ds:uri="cf7bb671-8198-4b47-b509-909fc9b35554"/>
-    <ds:schemaRef ds:uri="http://schemas.microsoft.com/office/2006/metadata/properties"/>
-    <ds:schemaRef ds:uri="http://purl.org/dc/elements/1.1/"/>
-    <ds:schemaRef ds:uri="http://schemas.microsoft.com/office/infopath/2007/PartnerControls"/>
-    <ds:schemaRef ds:uri="http://purl.org/dc/terms/"/>
-    <ds:schemaRef ds:uri="http://schemas.openxmlformats.org/package/2006/metadata/core-properties"/>
-  </ds:schemaRefs>
-</ds:datastoreItem>
+<file path=customXml/item2.xml><?xml version="1.0" encoding="utf-8"?>
+<?mso-contentType ?>
+<FormTemplates xmlns="http://schemas.microsoft.com/sharepoint/v3/contenttype/forms">
+  <Display>DocumentLibraryForm</Display>
+  <Edit>DocumentLibraryForm</Edit>
+  <New>DocumentLibraryForm</New>
+</FormTemplates>
 </file>
 
-<file path=customXml/itemProps2.xml><?xml version="1.0" encoding="utf-8"?>
-<ds:datastoreItem xmlns:ds="http://schemas.openxmlformats.org/officeDocument/2006/customXml" ds:itemID="{37A141FA-F374-4375-9ED1-B78A4A14258F}">
-  <ds:schemaRefs>
-    <ds:schemaRef ds:uri="http://schemas.microsoft.com/sharepoint/v3/contenttype/forms"/>
-  </ds:schemaRefs>
-</ds:datastoreItem>
+<file path=customXml/item3.xml><?xml version="1.0" encoding="utf-8"?>
+<p:properties xmlns:p="http://schemas.microsoft.com/office/2006/metadata/properties" xmlns:xsi="http://www.w3.org/2001/XMLSchema-instance" xmlns:pc="http://schemas.microsoft.com/office/infopath/2007/PartnerControls">
+  <documentManagement/>
+</p:properties>
 </file>
 
-<file path=customXml/itemProps3.xml><?xml version="1.0" encoding="utf-8"?>
+<file path=customXml/itemProps1.xml><?xml version="1.0" encoding="utf-8"?>
 <ds:datastoreItem xmlns:ds="http://schemas.openxmlformats.org/officeDocument/2006/customXml" ds:itemID="{E89D926E-7ACB-4F24-8006-B0341B23C64B}">
   <ds:schemaRefs>
     <ds:schemaRef ds:uri="http://schemas.microsoft.com/office/2006/metadata/contentType"/>
@@ -5397,4 +5457,28 @@
     <ds:schemaRef ds:uri="http://schemas.microsoft.com/internal/obd"/>
   </ds:schemaRefs>
 </ds:datastoreItem>
+</file>
+
+<file path=customXml/itemProps2.xml><?xml version="1.0" encoding="utf-8"?>
+<ds:datastoreItem xmlns:ds="http://schemas.openxmlformats.org/officeDocument/2006/customXml" ds:itemID="{37A141FA-F374-4375-9ED1-B78A4A14258F}">
+  <ds:schemaRefs>
+    <ds:schemaRef ds:uri="http://schemas.microsoft.com/sharepoint/v3/contenttype/forms"/>
+  </ds:schemaRefs>
+</ds:datastoreItem>
+</file>
+
+<file path=customXml/itemProps3.xml><?xml version="1.0" encoding="utf-8"?>
+<ds:datastoreItem xmlns:ds="http://schemas.openxmlformats.org/officeDocument/2006/customXml" ds:itemID="{69BF16A5-2603-4EF6-830D-D5A6DFB47F9C}">
+  <ds:schemaRefs>
+    <ds:schemaRef ds:uri="http://schemas.microsoft.com/office/2006/documentManagement/types"/>
+    <ds:schemaRef ds:uri="http://purl.org/dc/dcmitype/"/>
+    <ds:schemaRef ds:uri="http://www.w3.org/XML/1998/namespace"/>
+    <ds:schemaRef ds:uri="cf7bb671-8198-4b47-b509-909fc9b35554"/>
+    <ds:schemaRef ds:uri="http://schemas.microsoft.com/office/2006/metadata/properties"/>
+    <ds:schemaRef ds:uri="http://purl.org/dc/elements/1.1/"/>
+    <ds:schemaRef ds:uri="http://schemas.microsoft.com/office/infopath/2007/PartnerControls"/>
+    <ds:schemaRef ds:uri="http://purl.org/dc/terms/"/>
+    <ds:schemaRef ds:uri="http://schemas.openxmlformats.org/package/2006/metadata/core-properties"/>
+  </ds:schemaRefs>
+</ds:datastoreItem>
 </file>